--- a/assets/powerpoints/module-n1-orientation/C1-poussez-tirez.pptx
+++ b/assets/powerpoints/module-n1-orientation/C1-poussez-tirez.pptx
@@ -6111,7 +6111,43 @@
                 </a:solidFill>
                 <a:latin typeface="Verdana"/>
               </a:rPr>
-              <a:t>Tout le monde le fait, y compris les gens nés ici. Un indice matériel vaut le mot : une &lt;b&gt;plaque de métal plate&lt;/b&gt; se pousse, une &lt;b&gt;vraie poignée&lt;/b&gt; se tire. Les portes bien faites le disent sans écrire.</a:t>
+              <a:t>Tout le monde le fait, y compris les gens nés ici. Un indice matériel vaut le mot : une </a:t>
+            </a:r>
+            <a:r>
+              <a:rPr sz="2000" b="1" i="0">
+                <a:solidFill>
+                  <a:srgbClr val="4B4F52"/>
+                </a:solidFill>
+                <a:latin typeface="Verdana"/>
+              </a:rPr>
+              <a:t>plaque de métal plate</a:t>
+            </a:r>
+            <a:r>
+              <a:rPr sz="2000" b="0" i="0">
+                <a:solidFill>
+                  <a:srgbClr val="4B4F52"/>
+                </a:solidFill>
+                <a:latin typeface="Verdana"/>
+              </a:rPr>
+              <a:t> se pousse, une </a:t>
+            </a:r>
+            <a:r>
+              <a:rPr sz="2000" b="1" i="0">
+                <a:solidFill>
+                  <a:srgbClr val="4B4F52"/>
+                </a:solidFill>
+                <a:latin typeface="Verdana"/>
+              </a:rPr>
+              <a:t>vraie poignée</a:t>
+            </a:r>
+            <a:r>
+              <a:rPr sz="2000" b="0" i="0">
+                <a:solidFill>
+                  <a:srgbClr val="4B4F52"/>
+                </a:solidFill>
+                <a:latin typeface="Verdana"/>
+              </a:rPr>
+              <a:t> se tire. Les portes bien faites le disent sans écrire.</a:t>
             </a:r>
           </a:p>
         </p:txBody>
@@ -10412,13 +10448,58 @@
               </a:lnSpc>
             </a:pPr>
             <a:r>
+              <a:rPr sz="2000" b="1" i="0">
+                <a:solidFill>
+                  <a:srgbClr val="4B4F52"/>
+                </a:solidFill>
+                <a:latin typeface="Verdana"/>
+              </a:rPr>
+              <a:t>POUSSEZ</a:t>
+            </a:r>
+            <a:r>
               <a:rPr sz="2000" b="0" i="0">
                 <a:solidFill>
                   <a:srgbClr val="4B4F52"/>
                 </a:solidFill>
                 <a:latin typeface="Verdana"/>
               </a:rPr>
-              <a:t>&lt;b&gt;POUSSEZ&lt;/b&gt; : la porte va loin de moi, la main pousse. &lt;b&gt;TIREZ&lt;/b&gt; : la porte vient vers moi, la main ramène. &lt;b&gt;ENTREZ&lt;/b&gt; : on peut entrer sans frapper.</a:t>
+              <a:t> : la porte va loin de moi, la main pousse. </a:t>
+            </a:r>
+            <a:r>
+              <a:rPr sz="2000" b="1" i="0">
+                <a:solidFill>
+                  <a:srgbClr val="4B4F52"/>
+                </a:solidFill>
+                <a:latin typeface="Verdana"/>
+              </a:rPr>
+              <a:t>TIREZ</a:t>
+            </a:r>
+            <a:r>
+              <a:rPr sz="2000" b="0" i="0">
+                <a:solidFill>
+                  <a:srgbClr val="4B4F52"/>
+                </a:solidFill>
+                <a:latin typeface="Verdana"/>
+              </a:rPr>
+              <a:t> : la porte vient vers moi, la main ramène. </a:t>
+            </a:r>
+            <a:r>
+              <a:rPr sz="2000" b="1" i="0">
+                <a:solidFill>
+                  <a:srgbClr val="4B4F52"/>
+                </a:solidFill>
+                <a:latin typeface="Verdana"/>
+              </a:rPr>
+              <a:t>ENTREZ</a:t>
+            </a:r>
+            <a:r>
+              <a:rPr sz="2000" b="0" i="0">
+                <a:solidFill>
+                  <a:srgbClr val="4B4F52"/>
+                </a:solidFill>
+                <a:latin typeface="Verdana"/>
+              </a:rPr>
+              <a:t> : on peut entrer sans frapper.</a:t>
             </a:r>
           </a:p>
         </p:txBody>
